--- a/reference/archie/presentations/NPQG Video - Manim Graphics and Conventions.pptx
+++ b/reference/archie/presentations/NPQG Video - Manim Graphics and Conventions.pptx
@@ -3746,7 +3746,7 @@
 </file>
 
 <file path=ppt/slides/slide1.xml><?xml version="1.0" encoding="utf-8"?>
-<p:sld xmlns:a="http://schemas.openxmlformats.org/drawingml/2006/main" xmlns:r="http://schemas.openxmlformats.org/officeDocument/2006/relationships" xmlns:p="http://schemas.openxmlformats.org/presentationml/2006/main">
+<p:sld xmlns:a="http://schemas.openxmlformats.org/drawingml/2006/main" xmlns:a16="http://schemas.microsoft.com/office/drawing/2014/main" xmlns:ns3="http://schemas.microsoft.com/office/powerpoint/2010/main" xmlns:p="http://schemas.openxmlformats.org/presentationml/2006/main">
   <p:cSld>
     <p:bg>
       <p:bgPr>
@@ -3775,7 +3775,7 @@
           <p:cNvPr id="6" name="TextBox 5">
             <a:extLst>
               <a:ext uri="{FF2B5EF4-FFF2-40B4-BE49-F238E27FC236}">
-                <a16:creationId xmlns:a16="http://schemas.microsoft.com/office/drawing/2014/main" id="{E27E9F5D-1FBC-9D7B-5678-A9CF9F534CD6}"/>
+                <a16:creationId id="{E27E9F5D-1FBC-9D7B-5678-A9CF9F534CD6}"/>
               </a:ext>
             </a:extLst>
           </p:cNvPr>
@@ -3833,7 +3833,7 @@
           <p:cNvPr id="3" name="Rectangle 2">
             <a:extLst>
               <a:ext uri="{FF2B5EF4-FFF2-40B4-BE49-F238E27FC236}">
-                <a16:creationId xmlns:a16="http://schemas.microsoft.com/office/drawing/2014/main" id="{165A336C-9DE9-9203-4406-C074680B388C}"/>
+                <a16:creationId id="{165A336C-9DE9-9203-4406-C074680B388C}"/>
               </a:ext>
             </a:extLst>
           </p:cNvPr>
@@ -3890,7 +3890,7 @@
           <p:cNvPr id="4" name="Rectangle 3">
             <a:extLst>
               <a:ext uri="{FF2B5EF4-FFF2-40B4-BE49-F238E27FC236}">
-                <a16:creationId xmlns:a16="http://schemas.microsoft.com/office/drawing/2014/main" id="{F6EABFBC-E695-EC88-92F2-D10E0E39EBC8}"/>
+                <a16:creationId id="{F6EABFBC-E695-EC88-92F2-D10E0E39EBC8}"/>
               </a:ext>
             </a:extLst>
           </p:cNvPr>
@@ -3954,7 +3954,7 @@
           <p:cNvPr id="7" name="Rectangle 6">
             <a:extLst>
               <a:ext uri="{FF2B5EF4-FFF2-40B4-BE49-F238E27FC236}">
-                <a16:creationId xmlns:a16="http://schemas.microsoft.com/office/drawing/2014/main" id="{6E8BD314-EFC0-C911-5096-D9DCAEB2B76E}"/>
+                <a16:creationId id="{6E8BD314-EFC0-C911-5096-D9DCAEB2B76E}"/>
               </a:ext>
             </a:extLst>
           </p:cNvPr>
@@ -4018,7 +4018,7 @@
           <p:cNvPr id="17" name="Rectangle 16">
             <a:extLst>
               <a:ext uri="{FF2B5EF4-FFF2-40B4-BE49-F238E27FC236}">
-                <a16:creationId xmlns:a16="http://schemas.microsoft.com/office/drawing/2014/main" id="{02A5524A-7932-4BDB-F8EB-5B03F4679731}"/>
+                <a16:creationId id="{02A5524A-7932-4BDB-F8EB-5B03F4679731}"/>
               </a:ext>
             </a:extLst>
           </p:cNvPr>
@@ -4081,7 +4081,7 @@
           <p:cNvPr id="22" name="Rectangle 21">
             <a:extLst>
               <a:ext uri="{FF2B5EF4-FFF2-40B4-BE49-F238E27FC236}">
-                <a16:creationId xmlns:a16="http://schemas.microsoft.com/office/drawing/2014/main" id="{FB6D199E-B257-43A8-759F-62D2A0F2C90F}"/>
+                <a16:creationId id="{FB6D199E-B257-43A8-759F-62D2A0F2C90F}"/>
               </a:ext>
             </a:extLst>
           </p:cNvPr>
@@ -4145,7 +4145,7 @@
           <p:cNvPr id="23" name="Rectangle 22">
             <a:extLst>
               <a:ext uri="{FF2B5EF4-FFF2-40B4-BE49-F238E27FC236}">
-                <a16:creationId xmlns:a16="http://schemas.microsoft.com/office/drawing/2014/main" id="{44E7362D-CE29-DCCB-BAD6-AFC6F602451F}"/>
+                <a16:creationId id="{44E7362D-CE29-DCCB-BAD6-AFC6F602451F}"/>
               </a:ext>
             </a:extLst>
           </p:cNvPr>
@@ -4204,10 +4204,166 @@
           </a:p>
         </p:txBody>
       </p:sp>
+      <p:sp>
+        <p:nvSpPr>
+          <p:cNvPr id="24" name="Footer Placeholder 3"/>
+          <p:cNvSpPr txBox="1">
+            <a:spLocks/>
+          </p:cNvSpPr>
+          <p:nvPr/>
+        </p:nvSpPr>
+        <p:spPr>
+          <a:xfrm>
+            <a:off x="10942204" y="6481737"/>
+            <a:ext cx="1217443" cy="365125"/>
+          </a:xfrm>
+          <a:prstGeom prst="rect">
+            <a:avLst/>
+          </a:prstGeom>
+        </p:spPr>
+        <p:txBody>
+          <a:bodyPr vert="horz" lIns="91440" tIns="45720" rIns="91440" bIns="45720" rtlCol="0" anchor="ctr"/>
+          <a:lstStyle>
+            <a:defPPr>
+              <a:defRPr lang="en-US"/>
+            </a:defPPr>
+            <a:lvl1pPr marL="0" algn="ctr" defTabSz="914400" rtl="0" eaLnBrk="1" latinLnBrk="0" hangingPunct="1">
+              <a:defRPr sz="1200" kern="1200">
+                <a:solidFill>
+                  <a:schemeClr val="tx1">
+                    <a:tint val="75000"/>
+                  </a:schemeClr>
+                </a:solidFill>
+                <a:latin typeface="+mn-lt"/>
+                <a:ea typeface="+mn-ea"/>
+                <a:cs typeface="+mn-cs"/>
+              </a:defRPr>
+            </a:lvl1pPr>
+            <a:lvl2pPr marL="457200" algn="l" defTabSz="914400" rtl="0" eaLnBrk="1" latinLnBrk="0" hangingPunct="1">
+              <a:defRPr sz="1800" kern="1200">
+                <a:solidFill>
+                  <a:schemeClr val="tx1"/>
+                </a:solidFill>
+                <a:latin typeface="+mn-lt"/>
+                <a:ea typeface="+mn-ea"/>
+                <a:cs typeface="+mn-cs"/>
+              </a:defRPr>
+            </a:lvl2pPr>
+            <a:lvl3pPr marL="914400" algn="l" defTabSz="914400" rtl="0" eaLnBrk="1" latinLnBrk="0" hangingPunct="1">
+              <a:defRPr sz="1800" kern="1200">
+                <a:solidFill>
+                  <a:schemeClr val="tx1"/>
+                </a:solidFill>
+                <a:latin typeface="+mn-lt"/>
+                <a:ea typeface="+mn-ea"/>
+                <a:cs typeface="+mn-cs"/>
+              </a:defRPr>
+            </a:lvl3pPr>
+            <a:lvl4pPr marL="1371600" algn="l" defTabSz="914400" rtl="0" eaLnBrk="1" latinLnBrk="0" hangingPunct="1">
+              <a:defRPr sz="1800" kern="1200">
+                <a:solidFill>
+                  <a:schemeClr val="tx1"/>
+                </a:solidFill>
+                <a:latin typeface="+mn-lt"/>
+                <a:ea typeface="+mn-ea"/>
+                <a:cs typeface="+mn-cs"/>
+              </a:defRPr>
+            </a:lvl4pPr>
+            <a:lvl5pPr marL="1828800" algn="l" defTabSz="914400" rtl="0" eaLnBrk="1" latinLnBrk="0" hangingPunct="1">
+              <a:defRPr sz="1800" kern="1200">
+                <a:solidFill>
+                  <a:schemeClr val="tx1"/>
+                </a:solidFill>
+                <a:latin typeface="+mn-lt"/>
+                <a:ea typeface="+mn-ea"/>
+                <a:cs typeface="+mn-cs"/>
+              </a:defRPr>
+            </a:lvl5pPr>
+            <a:lvl6pPr marL="2286000" algn="l" defTabSz="914400" rtl="0" eaLnBrk="1" latinLnBrk="0" hangingPunct="1">
+              <a:defRPr sz="1800" kern="1200">
+                <a:solidFill>
+                  <a:schemeClr val="tx1"/>
+                </a:solidFill>
+                <a:latin typeface="+mn-lt"/>
+                <a:ea typeface="+mn-ea"/>
+                <a:cs typeface="+mn-cs"/>
+              </a:defRPr>
+            </a:lvl6pPr>
+            <a:lvl7pPr marL="2743200" algn="l" defTabSz="914400" rtl="0" eaLnBrk="1" latinLnBrk="0" hangingPunct="1">
+              <a:defRPr sz="1800" kern="1200">
+                <a:solidFill>
+                  <a:schemeClr val="tx1"/>
+                </a:solidFill>
+                <a:latin typeface="+mn-lt"/>
+                <a:ea typeface="+mn-ea"/>
+                <a:cs typeface="+mn-cs"/>
+              </a:defRPr>
+            </a:lvl7pPr>
+            <a:lvl8pPr marL="3200400" algn="l" defTabSz="914400" rtl="0" eaLnBrk="1" latinLnBrk="0" hangingPunct="1">
+              <a:defRPr sz="1800" kern="1200">
+                <a:solidFill>
+                  <a:schemeClr val="tx1"/>
+                </a:solidFill>
+                <a:latin typeface="+mn-lt"/>
+                <a:ea typeface="+mn-ea"/>
+                <a:cs typeface="+mn-cs"/>
+              </a:defRPr>
+            </a:lvl8pPr>
+            <a:lvl9pPr marL="3657600" algn="l" defTabSz="914400" rtl="0" eaLnBrk="1" latinLnBrk="0" hangingPunct="1">
+              <a:defRPr sz="1800" kern="1200">
+                <a:solidFill>
+                  <a:schemeClr val="tx1"/>
+                </a:solidFill>
+                <a:latin typeface="+mn-lt"/>
+                <a:ea typeface="+mn-ea"/>
+                <a:cs typeface="+mn-cs"/>
+              </a:defRPr>
+            </a:lvl9pPr>
+          </a:lstStyle>
+          <a:p>
+            <a:pPr marL="0" marR="0" lvl="0" indent="0" algn="ctr" defTabSz="914400" rtl="0" eaLnBrk="1" fontAlgn="auto" latinLnBrk="0" hangingPunct="1">
+              <a:lnSpc>
+                <a:spcPct val="100000"/>
+              </a:lnSpc>
+              <a:spcBef>
+                <a:spcPts val="0"/>
+              </a:spcBef>
+              <a:spcAft>
+                <a:spcPts val="0"/>
+              </a:spcAft>
+              <a:buClrTx/>
+              <a:buSzTx/>
+              <a:buFontTx/>
+              <a:buNone/>
+              <a:tabLst/>
+              <a:defRPr/>
+            </a:pPr>
+            <a:r>
+              <a:rPr kumimoji="0" lang="en-US" sz="1200" b="0" i="0" u="none" strike="noStrike" kern="1200" cap="none" spc="0" normalizeH="0" baseline="0" noProof="0" dirty="0">
+                <a:ln>
+                  <a:noFill/>
+                </a:ln>
+                <a:solidFill>
+                  <a:prstClr val="black">
+                    <a:tint val="75000"/>
+                  </a:prstClr>
+                </a:solidFill>
+                <a:effectLst/>
+                <a:uLnTx/>
+                <a:uFillTx/>
+                <a:latin typeface="Helvetica Neue" panose="02000503000000020004" pitchFamily="2" charset="0"/>
+                <a:ea typeface="Helvetica Neue" panose="02000503000000020004" pitchFamily="2" charset="0"/>
+                <a:cs typeface="Helvetica Neue" panose="02000503000000020004" pitchFamily="2" charset="0"/>
+              </a:rPr>
+              <a:t>architrino.com</a:t>
+            </a:r>
+          </a:p>
+        </p:txBody>
+      </p:sp>
     </p:spTree>
     <p:extLst>
       <p:ext uri="{BB962C8B-B14F-4D97-AF65-F5344CB8AC3E}">
-        <p14:creationId xmlns:p14="http://schemas.microsoft.com/office/powerpoint/2010/main" val="1887111588"/>
+        <ns3:creationId val="1887111588"/>
       </p:ext>
     </p:extLst>
   </p:cSld>
